--- a/牛只数据集/汇报材料/跨数据集目标检测泛化_组会汇报初版.pptx
+++ b/牛只数据集/汇报材料/跨数据集目标检测泛化_组会汇报初版.pptx
@@ -1955,7 +1955,7 @@
       <p:grpSpPr/>
       <p:pic>
         <p:nvPicPr>
-          <p:cNvPr id="9" name="图片 8"/>
+          <p:cNvPr id="10" name="图片 9"/>
           <p:cNvPicPr>
             <a:picLocks noChangeAspect="1"/>
           </p:cNvPicPr>
@@ -1963,45 +1963,20 @@
         </p:nvPicPr>
         <p:blipFill>
           <a:blip r:embed="rId1"/>
-          <a:srcRect l="21875" r="21875"/>
           <a:stretch>
             <a:fillRect/>
           </a:stretch>
         </p:blipFill>
         <p:spPr>
           <a:xfrm>
-            <a:off x="5334000" y="0"/>
-            <a:ext cx="6858000" cy="6858000"/>
+            <a:off x="5951855" y="0"/>
+            <a:ext cx="12192000" cy="6858000"/>
           </a:xfrm>
           <a:prstGeom prst="rect">
             <a:avLst/>
           </a:prstGeom>
         </p:spPr>
       </p:pic>
-      <p:sp>
-        <p:nvSpPr>
-          <p:cNvPr id="2" name="矩形 1"/>
-          <p:cNvSpPr>
-            <a:spLocks noGrp="1"/>
-          </p:cNvSpPr>
-          <p:nvPr/>
-        </p:nvSpPr>
-        <p:spPr>
-          <a:xfrm>
-            <a:off x="0" y="0"/>
-            <a:ext cx="7429500" cy="6858000"/>
-          </a:xfrm>
-          <a:prstGeom prst="rect">
-            <a:avLst/>
-          </a:prstGeom>
-          <a:solidFill>
-            <a:srgbClr val="172428"/>
-          </a:solidFill>
-          <a:ln w="0">
-            <a:noFill/>
-          </a:ln>
-        </p:spPr>
-      </p:sp>
       <p:sp>
         <p:nvSpPr>
           <p:cNvPr id="3" name="矩形 2"/>
@@ -2022,6 +1997,30 @@
             <a:srgbClr val="172428">
               <a:alpha val="85098"/>
             </a:srgbClr>
+          </a:solidFill>
+          <a:ln w="0">
+            <a:noFill/>
+          </a:ln>
+        </p:spPr>
+      </p:sp>
+      <p:sp>
+        <p:nvSpPr>
+          <p:cNvPr id="2" name="矩形 1"/>
+          <p:cNvSpPr>
+            <a:spLocks noGrp="1"/>
+          </p:cNvSpPr>
+          <p:nvPr/>
+        </p:nvSpPr>
+        <p:spPr>
+          <a:xfrm>
+            <a:off x="335280" y="0"/>
+            <a:ext cx="7429500" cy="6858000"/>
+          </a:xfrm>
+          <a:prstGeom prst="rect">
+            <a:avLst/>
+          </a:prstGeom>
+          <a:solidFill>
+            <a:srgbClr val="172428"/>
           </a:solidFill>
           <a:ln w="0">
             <a:noFill/>
